--- a/dist/초4/영어/소리낱말문장/초4_영어_소리낱말문장_03_짧은문장읽고쓰기_학생용.pptx
+++ b/dist/초4/영어/소리낱말문장/초4_영어_소리낱말문장_03_짧은문장읽고쓰기_학생용.pptx
@@ -120,13 +120,13 @@
   <p:extLst>
     <p:ext uri="{521415D9-36F7-43E2-AB2F-B90AF26B5E84}">
       <p14:sectionLst xmlns:p14="http://schemas.microsoft.com/office/powerpoint/2010/main">
-        <p14:section name="도입" id="{7a58c648-cf2b-f8fe-bf46-64933a8cd636}">
+        <p14:section name="도입" id="{f2e10554-8647-f4fc-d20d-6a1275b4f2eb}">
           <p14:sldIdLst>
             <p14:sldId id="256"/>
             <p14:sldId id="257"/>
           </p14:sldIdLst>
         </p14:section>
-        <p14:section name="개념" id="{9048e17e-8191-d247-75f4-40378db000cc}">
+        <p14:section name="개념" id="{5e70684e-d8b8-e131-d610-9be0caca8d7d}">
           <p14:sldIdLst>
             <p14:sldId id="258"/>
             <p14:sldId id="259"/>
@@ -134,7 +134,7 @@
             <p14:sldId id="262"/>
           </p14:sldIdLst>
         </p14:section>
-        <p14:section name="연습" id="{b75505ad-2b70-2964-21c9-fc39d2e34bbb}">
+        <p14:section name="연습" id="{03cac8b0-d8cc-1f37-94be-9a77f12a1447}">
           <p14:sldIdLst>
             <p14:sldId id="261"/>
             <p14:sldId id="263"/>
@@ -142,24 +142,24 @@
             <p14:sldId id="265"/>
           </p14:sldIdLst>
         </p14:section>
-        <p14:section name="개념" id="{3cea8210-1642-9a45-5626-8c374dea7af5}">
+        <p14:section name="개념" id="{4f91067d-1e00-d542-25d2-491d9c6f26b4}">
           <p14:sldIdLst/>
         </p14:section>
-        <p14:section name="연습" id="{13c73b37-019b-63b2-3ec8-e341006e0335}">
+        <p14:section name="연습" id="{34046ccb-c840-d20c-e2b3-639346870609}">
           <p14:sldIdLst/>
         </p14:section>
-        <p14:section name="확인" id="{dde1faae-48b4-78d6-217b-270b48e7ad53}">
+        <p14:section name="확인" id="{83f77b5e-60ee-53fd-225f-6063c96593fa}">
           <p14:sldIdLst>
             <p14:sldId id="266"/>
             <p14:sldId id="267"/>
           </p14:sldIdLst>
         </p14:section>
-        <p14:section name="정리" id="{ba921a31-819e-33ab-34d8-509253c46aa0}">
+        <p14:section name="정리" id="{7befa8fd-c91f-c3b8-5243-fb7c3e721d74}">
           <p14:sldIdLst>
             <p14:sldId id="268"/>
           </p14:sldIdLst>
         </p14:section>
-        <p14:section name="보충" id="{3d8ee93a-0349-f915-4804-a19493257504}">
+        <p14:section name="보충" id="{0a5bc0c1-d51b-37de-315c-6699e6df5774}">
           <p14:sldIdLst>
             <p14:sldId id="269"/>
           </p14:sldIdLst>
